--- a/Materials/Figure study design/study design basal attributes_wide.pptx
+++ b/Materials/Figure study design/study design basal attributes_wide.pptx
@@ -243,7 +243,7 @@
           <a:p>
             <a:fld id="{24188342-571A-6841-AC1D-E620118845AD}" type="datetimeFigureOut">
               <a:rPr lang="en-US" smtClean="0"/>
-              <a:t>4/3/2025</a:t>
+              <a:t>6/24/2025</a:t>
             </a:fld>
             <a:endParaRPr lang="en-US"/>
           </a:p>
@@ -413,7 +413,7 @@
           <a:p>
             <a:fld id="{24188342-571A-6841-AC1D-E620118845AD}" type="datetimeFigureOut">
               <a:rPr lang="en-US" smtClean="0"/>
-              <a:t>4/3/2025</a:t>
+              <a:t>6/24/2025</a:t>
             </a:fld>
             <a:endParaRPr lang="en-US"/>
           </a:p>
@@ -593,7 +593,7 @@
           <a:p>
             <a:fld id="{24188342-571A-6841-AC1D-E620118845AD}" type="datetimeFigureOut">
               <a:rPr lang="en-US" smtClean="0"/>
-              <a:t>4/3/2025</a:t>
+              <a:t>6/24/2025</a:t>
             </a:fld>
             <a:endParaRPr lang="en-US"/>
           </a:p>
@@ -763,7 +763,7 @@
           <a:p>
             <a:fld id="{24188342-571A-6841-AC1D-E620118845AD}" type="datetimeFigureOut">
               <a:rPr lang="en-US" smtClean="0"/>
-              <a:t>4/3/2025</a:t>
+              <a:t>6/24/2025</a:t>
             </a:fld>
             <a:endParaRPr lang="en-US"/>
           </a:p>
@@ -1007,7 +1007,7 @@
           <a:p>
             <a:fld id="{24188342-571A-6841-AC1D-E620118845AD}" type="datetimeFigureOut">
               <a:rPr lang="en-US" smtClean="0"/>
-              <a:t>4/3/2025</a:t>
+              <a:t>6/24/2025</a:t>
             </a:fld>
             <a:endParaRPr lang="en-US"/>
           </a:p>
@@ -1239,7 +1239,7 @@
           <a:p>
             <a:fld id="{24188342-571A-6841-AC1D-E620118845AD}" type="datetimeFigureOut">
               <a:rPr lang="en-US" smtClean="0"/>
-              <a:t>4/3/2025</a:t>
+              <a:t>6/24/2025</a:t>
             </a:fld>
             <a:endParaRPr lang="en-US"/>
           </a:p>
@@ -1606,7 +1606,7 @@
           <a:p>
             <a:fld id="{24188342-571A-6841-AC1D-E620118845AD}" type="datetimeFigureOut">
               <a:rPr lang="en-US" smtClean="0"/>
-              <a:t>4/3/2025</a:t>
+              <a:t>6/24/2025</a:t>
             </a:fld>
             <a:endParaRPr lang="en-US"/>
           </a:p>
@@ -1724,7 +1724,7 @@
           <a:p>
             <a:fld id="{24188342-571A-6841-AC1D-E620118845AD}" type="datetimeFigureOut">
               <a:rPr lang="en-US" smtClean="0"/>
-              <a:t>4/3/2025</a:t>
+              <a:t>6/24/2025</a:t>
             </a:fld>
             <a:endParaRPr lang="en-US"/>
           </a:p>
@@ -1819,7 +1819,7 @@
           <a:p>
             <a:fld id="{24188342-571A-6841-AC1D-E620118845AD}" type="datetimeFigureOut">
               <a:rPr lang="en-US" smtClean="0"/>
-              <a:t>4/3/2025</a:t>
+              <a:t>6/24/2025</a:t>
             </a:fld>
             <a:endParaRPr lang="en-US"/>
           </a:p>
@@ -2096,7 +2096,7 @@
           <a:p>
             <a:fld id="{24188342-571A-6841-AC1D-E620118845AD}" type="datetimeFigureOut">
               <a:rPr lang="en-US" smtClean="0"/>
-              <a:t>4/3/2025</a:t>
+              <a:t>6/24/2025</a:t>
             </a:fld>
             <a:endParaRPr lang="en-US"/>
           </a:p>
@@ -2353,7 +2353,7 @@
           <a:p>
             <a:fld id="{24188342-571A-6841-AC1D-E620118845AD}" type="datetimeFigureOut">
               <a:rPr lang="en-US" smtClean="0"/>
-              <a:t>4/3/2025</a:t>
+              <a:t>6/24/2025</a:t>
             </a:fld>
             <a:endParaRPr lang="en-US"/>
           </a:p>
@@ -2566,7 +2566,7 @@
           <a:p>
             <a:fld id="{24188342-571A-6841-AC1D-E620118845AD}" type="datetimeFigureOut">
               <a:rPr lang="en-US" smtClean="0"/>
-              <a:t>4/3/2025</a:t>
+              <a:t>6/24/2025</a:t>
             </a:fld>
             <a:endParaRPr lang="en-US"/>
           </a:p>
@@ -3393,7 +3393,7 @@
         <p:spPr>
           <a:xfrm>
             <a:off x="218621" y="4569667"/>
-            <a:ext cx="2887793" cy="584775"/>
+            <a:ext cx="3179596" cy="584775"/>
           </a:xfrm>
           <a:prstGeom prst="rect">
             <a:avLst/>
@@ -3408,7 +3408,7 @@
           <a:p>
             <a:r>
               <a:rPr lang="en-US" sz="1600" dirty="0"/>
-              <a:t>Conducted large-scale CAM study with N=192 laypersons</a:t>
+              <a:t>Conducted a large-scale CAM study (N=192) to assess lay perceptions.</a:t>
             </a:r>
           </a:p>
         </p:txBody>
@@ -3559,40 +3559,6 @@
           </a:p>
         </p:txBody>
       </p:sp>
-      <p:pic>
-        <p:nvPicPr>
-          <p:cNvPr id="47" name="Google Shape;536;p77">
-            <a:extLst>
-              <a:ext uri="{FF2B5EF4-FFF2-40B4-BE49-F238E27FC236}">
-                <a16:creationId xmlns:a16="http://schemas.microsoft.com/office/drawing/2014/main" id="{B921DBB6-10E7-44C4-8149-D22A268D3ED1}"/>
-              </a:ext>
-            </a:extLst>
-          </p:cNvPr>
-          <p:cNvPicPr preferRelativeResize="0"/>
-          <p:nvPr/>
-        </p:nvPicPr>
-        <p:blipFill>
-          <a:blip r:embed="rId10">
-            <a:alphaModFix/>
-          </a:blip>
-          <a:stretch>
-            <a:fillRect/>
-          </a:stretch>
-        </p:blipFill>
-        <p:spPr>
-          <a:xfrm>
-            <a:off x="346707" y="5534365"/>
-            <a:ext cx="1621241" cy="1114122"/>
-          </a:xfrm>
-          <a:prstGeom prst="rect">
-            <a:avLst/>
-          </a:prstGeom>
-          <a:noFill/>
-          <a:ln>
-            <a:noFill/>
-          </a:ln>
-        </p:spPr>
-      </p:pic>
       <p:sp>
         <p:nvSpPr>
           <p:cNvPr id="48" name="Textfeld 47">
@@ -3607,8 +3573,8 @@
         </p:nvSpPr>
         <p:spPr>
           <a:xfrm>
-            <a:off x="97338" y="6687766"/>
-            <a:ext cx="2443508" cy="1077218"/>
+            <a:off x="179336" y="6522950"/>
+            <a:ext cx="2329978" cy="1323439"/>
           </a:xfrm>
           <a:prstGeom prst="rect">
             <a:avLst/>
@@ -3623,47 +3589,17 @@
           <a:p>
             <a:r>
               <a:rPr lang="en-US" sz="1600" dirty="0"/>
-              <a:t>Applied LLMs to create textual descriptions of future material systems using identified clusters</a:t>
-            </a:r>
-          </a:p>
-        </p:txBody>
-      </p:sp>
-      <p:pic>
-        <p:nvPicPr>
-          <p:cNvPr id="50" name="Grafik 49">
+              <a:t>LLM-assisted generation of expert-refined scenarios for future material systems using attribute clusters.</a:t>
+            </a:r>
+          </a:p>
+        </p:txBody>
+      </p:sp>
+      <p:sp>
+        <p:nvSpPr>
+          <p:cNvPr id="55" name="Textfeld 54">
             <a:extLst>
               <a:ext uri="{FF2B5EF4-FFF2-40B4-BE49-F238E27FC236}">
-                <a16:creationId xmlns:a16="http://schemas.microsoft.com/office/drawing/2014/main" id="{211C4020-E26B-4BCE-98D1-7916C6ECF917}"/>
-              </a:ext>
-            </a:extLst>
-          </p:cNvPr>
-          <p:cNvPicPr>
-            <a:picLocks noChangeAspect="1"/>
-          </p:cNvPicPr>
-          <p:nvPr/>
-        </p:nvPicPr>
-        <p:blipFill>
-          <a:blip r:embed="rId4"/>
-          <a:stretch>
-            <a:fillRect/>
-          </a:stretch>
-        </p:blipFill>
-        <p:spPr>
-          <a:xfrm>
-            <a:off x="5207828" y="5593547"/>
-            <a:ext cx="610447" cy="543934"/>
-          </a:xfrm>
-          <a:prstGeom prst="rect">
-            <a:avLst/>
-          </a:prstGeom>
-        </p:spPr>
-      </p:pic>
-      <p:sp>
-        <p:nvSpPr>
-          <p:cNvPr id="51" name="Textfeld 50">
-            <a:extLst>
-              <a:ext uri="{FF2B5EF4-FFF2-40B4-BE49-F238E27FC236}">
-                <a16:creationId xmlns:a16="http://schemas.microsoft.com/office/drawing/2014/main" id="{F7349AE2-5717-41DA-A556-0976A2F4E210}"/>
+                <a16:creationId xmlns:a16="http://schemas.microsoft.com/office/drawing/2014/main" id="{EF92097F-88B8-4CA4-99ED-5D3F3D751939}"/>
               </a:ext>
             </a:extLst>
           </p:cNvPr>
@@ -3672,8 +3608,8 @@
         </p:nvSpPr>
         <p:spPr>
           <a:xfrm>
-            <a:off x="6442092" y="5555168"/>
-            <a:ext cx="2306586" cy="830997"/>
+            <a:off x="6140287" y="5724169"/>
+            <a:ext cx="2588684" cy="1815882"/>
           </a:xfrm>
           <a:prstGeom prst="rect">
             <a:avLst/>
@@ -3688,29 +3624,142 @@
           <a:p>
             <a:r>
               <a:rPr lang="en-US" sz="1600" dirty="0"/>
-              <a:t>Used ratings of </a:t>
-            </a:r>
-            <a:r>
-              <a:rPr lang="en-US" sz="1600" dirty="0">
-                <a:highlight>
-                  <a:srgbClr val="FFFF00"/>
-                </a:highlight>
-              </a:rPr>
-              <a:t>X</a:t>
-            </a:r>
-            <a:r>
-              <a:rPr lang="en-US" sz="1600" dirty="0"/>
-              <a:t> experts to check the plausibility of textual descriptions</a:t>
-            </a:r>
-          </a:p>
-        </p:txBody>
-      </p:sp>
-      <p:sp>
-        <p:nvSpPr>
-          <p:cNvPr id="52" name="Pfeil: nach rechts 51">
+              <a:t>Conducted large-scale study (N=298) assessing lay perceptions of six material system descriptions across usefulness, trustworthiness, usage intention, and emotional response.</a:t>
+            </a:r>
+          </a:p>
+        </p:txBody>
+      </p:sp>
+      <p:sp>
+        <p:nvSpPr>
+          <p:cNvPr id="57" name="Textfeld 56">
             <a:extLst>
               <a:ext uri="{FF2B5EF4-FFF2-40B4-BE49-F238E27FC236}">
-                <a16:creationId xmlns:a16="http://schemas.microsoft.com/office/drawing/2014/main" id="{23A44A97-4160-434C-9736-13B50990A1EC}"/>
+                <a16:creationId xmlns:a16="http://schemas.microsoft.com/office/drawing/2014/main" id="{F07FA37C-31D9-4D57-9710-1D36CDD32C06}"/>
+              </a:ext>
+            </a:extLst>
+          </p:cNvPr>
+          <p:cNvSpPr txBox="1"/>
+          <p:nvPr/>
+        </p:nvSpPr>
+        <p:spPr>
+          <a:xfrm>
+            <a:off x="2840257" y="7540051"/>
+            <a:ext cx="2443508" cy="338554"/>
+          </a:xfrm>
+          <a:prstGeom prst="rect">
+            <a:avLst/>
+          </a:prstGeom>
+          <a:noFill/>
+        </p:spPr>
+        <p:txBody>
+          <a:bodyPr wrap="square" rtlCol="0">
+            <a:spAutoFit/>
+          </a:bodyPr>
+          <a:lstStyle/>
+          <a:p>
+            <a:r>
+              <a:rPr lang="en-US" sz="1600" dirty="0"/>
+              <a:t>Scenario 1 (Cluster 3+6)</a:t>
+            </a:r>
+          </a:p>
+        </p:txBody>
+      </p:sp>
+      <p:sp>
+        <p:nvSpPr>
+          <p:cNvPr id="37" name="TextBox 35">
+            <a:extLst>
+              <a:ext uri="{FF2B5EF4-FFF2-40B4-BE49-F238E27FC236}">
+                <a16:creationId xmlns:a16="http://schemas.microsoft.com/office/drawing/2014/main" id="{8147B784-E847-4865-8C53-347F8F6EC988}"/>
+              </a:ext>
+            </a:extLst>
+          </p:cNvPr>
+          <p:cNvSpPr txBox="1"/>
+          <p:nvPr/>
+        </p:nvSpPr>
+        <p:spPr>
+          <a:xfrm>
+            <a:off x="1334844" y="2157212"/>
+            <a:ext cx="6895933" cy="369332"/>
+          </a:xfrm>
+          <a:prstGeom prst="rect">
+            <a:avLst/>
+          </a:prstGeom>
+          <a:noFill/>
+          <a:ln>
+            <a:solidFill>
+              <a:srgbClr val="859DB0"/>
+            </a:solidFill>
+          </a:ln>
+        </p:spPr>
+        <p:txBody>
+          <a:bodyPr wrap="square" rtlCol="0">
+            <a:spAutoFit/>
+          </a:bodyPr>
+          <a:lstStyle/>
+          <a:p>
+            <a:pPr algn="ctr"/>
+            <a:r>
+              <a:rPr lang="en-US" b="1" dirty="0">
+                <a:latin typeface="Times New Roman" panose="02020603050405020304" pitchFamily="18" charset="0"/>
+                <a:ea typeface="Yu Gothic" panose="020B0400000000000000" pitchFamily="34" charset="-128"/>
+                <a:cs typeface="Times New Roman" panose="02020603050405020304" pitchFamily="18" charset="0"/>
+              </a:rPr>
+              <a:t>Part II: Cognitive-Affective Maps study</a:t>
+            </a:r>
+          </a:p>
+        </p:txBody>
+      </p:sp>
+      <p:sp>
+        <p:nvSpPr>
+          <p:cNvPr id="38" name="TextBox 35">
+            <a:extLst>
+              <a:ext uri="{FF2B5EF4-FFF2-40B4-BE49-F238E27FC236}">
+                <a16:creationId xmlns:a16="http://schemas.microsoft.com/office/drawing/2014/main" id="{94061FB4-EF7F-4A89-BDD8-2A2DA2E1B222}"/>
+              </a:ext>
+            </a:extLst>
+          </p:cNvPr>
+          <p:cNvSpPr txBox="1"/>
+          <p:nvPr/>
+        </p:nvSpPr>
+        <p:spPr>
+          <a:xfrm>
+            <a:off x="1334844" y="5150744"/>
+            <a:ext cx="6895933" cy="369332"/>
+          </a:xfrm>
+          <a:prstGeom prst="rect">
+            <a:avLst/>
+          </a:prstGeom>
+          <a:noFill/>
+          <a:ln>
+            <a:solidFill>
+              <a:srgbClr val="859DB0"/>
+            </a:solidFill>
+          </a:ln>
+        </p:spPr>
+        <p:txBody>
+          <a:bodyPr wrap="square" rtlCol="0">
+            <a:spAutoFit/>
+          </a:bodyPr>
+          <a:lstStyle/>
+          <a:p>
+            <a:pPr algn="ctr"/>
+            <a:r>
+              <a:rPr lang="en-US" b="1" dirty="0">
+                <a:latin typeface="Times New Roman" panose="02020603050405020304" pitchFamily="18" charset="0"/>
+                <a:ea typeface="Yu Gothic" panose="020B0400000000000000" pitchFamily="34" charset="-128"/>
+                <a:cs typeface="Times New Roman" panose="02020603050405020304" pitchFamily="18" charset="0"/>
+              </a:rPr>
+              <a:t>Part III: proof of concepts - textual descriptions of identified clusters</a:t>
+            </a:r>
+          </a:p>
+        </p:txBody>
+      </p:sp>
+      <p:sp>
+        <p:nvSpPr>
+          <p:cNvPr id="39" name="Pfeil: nach rechts 38">
+            <a:extLst>
+              <a:ext uri="{FF2B5EF4-FFF2-40B4-BE49-F238E27FC236}">
+                <a16:creationId xmlns:a16="http://schemas.microsoft.com/office/drawing/2014/main" id="{40A44B92-4F5B-4C9C-B729-9E3593B403D6}"/>
               </a:ext>
             </a:extLst>
           </p:cNvPr>
@@ -3718,9 +3767,9 @@
           <p:nvPr/>
         </p:nvSpPr>
         <p:spPr>
-          <a:xfrm rot="19535916">
-            <a:off x="5205241" y="6056655"/>
-            <a:ext cx="1221257" cy="475188"/>
+          <a:xfrm>
+            <a:off x="2211965" y="5572232"/>
+            <a:ext cx="3654217" cy="494663"/>
           </a:xfrm>
           <a:prstGeom prst="rightArrow">
             <a:avLst/>
@@ -3753,10 +3802,10 @@
       </p:sp>
       <p:pic>
         <p:nvPicPr>
-          <p:cNvPr id="53" name="Grafik 52">
+          <p:cNvPr id="44" name="Grafik 43">
             <a:extLst>
               <a:ext uri="{FF2B5EF4-FFF2-40B4-BE49-F238E27FC236}">
-                <a16:creationId xmlns:a16="http://schemas.microsoft.com/office/drawing/2014/main" id="{3263AEDA-C279-4561-9103-5706A3AD4FB9}"/>
+                <a16:creationId xmlns:a16="http://schemas.microsoft.com/office/drawing/2014/main" id="{70461E36-6E94-41D5-8797-5EB6BA2B63F0}"/>
               </a:ext>
             </a:extLst>
           </p:cNvPr>
@@ -3773,113 +3822,50 @@
         </p:blipFill>
         <p:spPr>
           <a:xfrm>
-            <a:off x="7708598" y="6371861"/>
-            <a:ext cx="521328" cy="484927"/>
+            <a:off x="380233" y="5789382"/>
+            <a:ext cx="675301" cy="628149"/>
           </a:xfrm>
           <a:prstGeom prst="rect">
             <a:avLst/>
           </a:prstGeom>
         </p:spPr>
       </p:pic>
-      <p:sp>
-        <p:nvSpPr>
-          <p:cNvPr id="54" name="Pfeil: nach rechts 53">
+      <p:pic>
+        <p:nvPicPr>
+          <p:cNvPr id="4" name="Grafik 3">
             <a:extLst>
               <a:ext uri="{FF2B5EF4-FFF2-40B4-BE49-F238E27FC236}">
-                <a16:creationId xmlns:a16="http://schemas.microsoft.com/office/drawing/2014/main" id="{41DBDFC0-585E-4D6F-A787-987DE718656C}"/>
+                <a16:creationId xmlns:a16="http://schemas.microsoft.com/office/drawing/2014/main" id="{BA90B822-23FC-4CE9-A8B2-1C15C37A356E}"/>
               </a:ext>
             </a:extLst>
           </p:cNvPr>
-          <p:cNvSpPr/>
+          <p:cNvPicPr>
+            <a:picLocks noChangeAspect="1"/>
+          </p:cNvPicPr>
           <p:nvPr/>
-        </p:nvSpPr>
-        <p:spPr>
-          <a:xfrm rot="5400000">
-            <a:off x="7066147" y="6463578"/>
-            <a:ext cx="572116" cy="369817"/>
-          </a:xfrm>
-          <a:prstGeom prst="rightArrow">
-            <a:avLst/>
-          </a:prstGeom>
-        </p:spPr>
-        <p:style>
-          <a:lnRef idx="2">
-            <a:schemeClr val="dk1">
-              <a:shade val="50000"/>
-            </a:schemeClr>
-          </a:lnRef>
-          <a:fillRef idx="1">
-            <a:schemeClr val="dk1"/>
-          </a:fillRef>
-          <a:effectRef idx="0">
-            <a:schemeClr val="dk1"/>
-          </a:effectRef>
-          <a:fontRef idx="minor">
-            <a:schemeClr val="lt1"/>
-          </a:fontRef>
-        </p:style>
-        <p:txBody>
-          <a:bodyPr rtlCol="0" anchor="ctr"/>
-          <a:lstStyle/>
-          <a:p>
-            <a:pPr algn="ctr"/>
-            <a:endParaRPr lang="en-US" sz="1600"/>
-          </a:p>
-        </p:txBody>
-      </p:sp>
-      <p:sp>
-        <p:nvSpPr>
-          <p:cNvPr id="55" name="Textfeld 54">
-            <a:extLst>
-              <a:ext uri="{FF2B5EF4-FFF2-40B4-BE49-F238E27FC236}">
-                <a16:creationId xmlns:a16="http://schemas.microsoft.com/office/drawing/2014/main" id="{EF92097F-88B8-4CA4-99ED-5D3F3D751939}"/>
-              </a:ext>
-            </a:extLst>
-          </p:cNvPr>
-          <p:cNvSpPr txBox="1"/>
-          <p:nvPr/>
-        </p:nvSpPr>
-        <p:spPr>
-          <a:xfrm>
-            <a:off x="5872857" y="6863388"/>
-            <a:ext cx="3087519" cy="1077218"/>
+        </p:nvPicPr>
+        <p:blipFill>
+          <a:blip r:embed="rId10"/>
+          <a:stretch>
+            <a:fillRect/>
+          </a:stretch>
+        </p:blipFill>
+        <p:spPr>
+          <a:xfrm>
+            <a:off x="2341663" y="6037059"/>
+            <a:ext cx="3768655" cy="1578888"/>
           </a:xfrm>
           <a:prstGeom prst="rect">
             <a:avLst/>
           </a:prstGeom>
-          <a:noFill/>
-        </p:spPr>
-        <p:txBody>
-          <a:bodyPr wrap="square" rtlCol="0">
-            <a:spAutoFit/>
-          </a:bodyPr>
-          <a:lstStyle/>
-          <a:p>
-            <a:r>
-              <a:rPr lang="en-US" sz="1600" dirty="0"/>
-              <a:t>Conducted large-scale study with N=</a:t>
-            </a:r>
-            <a:r>
-              <a:rPr lang="en-US" sz="1600" dirty="0">
-                <a:highlight>
-                  <a:srgbClr val="FFFF00"/>
-                </a:highlight>
-              </a:rPr>
-              <a:t>X</a:t>
-            </a:r>
-            <a:r>
-              <a:rPr lang="en-US" sz="1600" dirty="0"/>
-              <a:t> laypersons to get the acceptance of differently described material systems</a:t>
-            </a:r>
-          </a:p>
-        </p:txBody>
-      </p:sp>
+        </p:spPr>
+      </p:pic>
       <p:pic>
         <p:nvPicPr>
-          <p:cNvPr id="20" name="Grafik 19">
+          <p:cNvPr id="6" name="Grafik 5">
             <a:extLst>
               <a:ext uri="{FF2B5EF4-FFF2-40B4-BE49-F238E27FC236}">
-                <a16:creationId xmlns:a16="http://schemas.microsoft.com/office/drawing/2014/main" id="{FF6B068D-E960-45B6-84FB-DE95281E5508}"/>
+                <a16:creationId xmlns:a16="http://schemas.microsoft.com/office/drawing/2014/main" id="{5C83F214-3CEC-4F09-9632-6EA5A0D3B771}"/>
               </a:ext>
             </a:extLst>
           </p:cNvPr>
@@ -3896,250 +3882,14 @@
         </p:blipFill>
         <p:spPr>
           <a:xfrm>
-            <a:off x="3381341" y="5514354"/>
-            <a:ext cx="1510331" cy="890101"/>
+            <a:off x="1184573" y="5764289"/>
+            <a:ext cx="667550" cy="667550"/>
           </a:xfrm>
           <a:prstGeom prst="rect">
             <a:avLst/>
           </a:prstGeom>
         </p:spPr>
       </p:pic>
-      <p:pic>
-        <p:nvPicPr>
-          <p:cNvPr id="56" name="Grafik 55">
-            <a:extLst>
-              <a:ext uri="{FF2B5EF4-FFF2-40B4-BE49-F238E27FC236}">
-                <a16:creationId xmlns:a16="http://schemas.microsoft.com/office/drawing/2014/main" id="{FAE7A22C-E4AF-4727-AF46-E16D595124BC}"/>
-              </a:ext>
-            </a:extLst>
-          </p:cNvPr>
-          <p:cNvPicPr>
-            <a:picLocks noChangeAspect="1"/>
-          </p:cNvPicPr>
-          <p:nvPr/>
-        </p:nvPicPr>
-        <p:blipFill>
-          <a:blip r:embed="rId11"/>
-          <a:stretch>
-            <a:fillRect/>
-          </a:stretch>
-        </p:blipFill>
-        <p:spPr>
-          <a:xfrm>
-            <a:off x="3432123" y="6665769"/>
-            <a:ext cx="1510331" cy="890101"/>
-          </a:xfrm>
-          <a:prstGeom prst="rect">
-            <a:avLst/>
-          </a:prstGeom>
-        </p:spPr>
-      </p:pic>
-      <p:sp>
-        <p:nvSpPr>
-          <p:cNvPr id="57" name="Textfeld 56">
-            <a:extLst>
-              <a:ext uri="{FF2B5EF4-FFF2-40B4-BE49-F238E27FC236}">
-                <a16:creationId xmlns:a16="http://schemas.microsoft.com/office/drawing/2014/main" id="{F07FA37C-31D9-4D57-9710-1D36CDD32C06}"/>
-              </a:ext>
-            </a:extLst>
-          </p:cNvPr>
-          <p:cNvSpPr txBox="1"/>
-          <p:nvPr/>
-        </p:nvSpPr>
-        <p:spPr>
-          <a:xfrm>
-            <a:off x="3398217" y="6435896"/>
-            <a:ext cx="2443508" cy="338554"/>
-          </a:xfrm>
-          <a:prstGeom prst="rect">
-            <a:avLst/>
-          </a:prstGeom>
-          <a:noFill/>
-        </p:spPr>
-        <p:txBody>
-          <a:bodyPr wrap="square" rtlCol="0">
-            <a:spAutoFit/>
-          </a:bodyPr>
-          <a:lstStyle/>
-          <a:p>
-            <a:r>
-              <a:rPr lang="en-US" sz="1600" dirty="0"/>
-              <a:t>Positive description</a:t>
-            </a:r>
-          </a:p>
-        </p:txBody>
-      </p:sp>
-      <p:sp>
-        <p:nvSpPr>
-          <p:cNvPr id="58" name="Textfeld 57">
-            <a:extLst>
-              <a:ext uri="{FF2B5EF4-FFF2-40B4-BE49-F238E27FC236}">
-                <a16:creationId xmlns:a16="http://schemas.microsoft.com/office/drawing/2014/main" id="{DC68A128-B75E-407A-B13D-8417408F4062}"/>
-              </a:ext>
-            </a:extLst>
-          </p:cNvPr>
-          <p:cNvSpPr txBox="1"/>
-          <p:nvPr/>
-        </p:nvSpPr>
-        <p:spPr>
-          <a:xfrm>
-            <a:off x="3309153" y="7515607"/>
-            <a:ext cx="2443508" cy="338554"/>
-          </a:xfrm>
-          <a:prstGeom prst="rect">
-            <a:avLst/>
-          </a:prstGeom>
-          <a:noFill/>
-        </p:spPr>
-        <p:txBody>
-          <a:bodyPr wrap="square" rtlCol="0">
-            <a:spAutoFit/>
-          </a:bodyPr>
-          <a:lstStyle/>
-          <a:p>
-            <a:r>
-              <a:rPr lang="en-US" sz="1600" dirty="0"/>
-              <a:t>Negative description</a:t>
-            </a:r>
-          </a:p>
-        </p:txBody>
-      </p:sp>
-      <p:sp>
-        <p:nvSpPr>
-          <p:cNvPr id="37" name="TextBox 35">
-            <a:extLst>
-              <a:ext uri="{FF2B5EF4-FFF2-40B4-BE49-F238E27FC236}">
-                <a16:creationId xmlns:a16="http://schemas.microsoft.com/office/drawing/2014/main" id="{8147B784-E847-4865-8C53-347F8F6EC988}"/>
-              </a:ext>
-            </a:extLst>
-          </p:cNvPr>
-          <p:cNvSpPr txBox="1"/>
-          <p:nvPr/>
-        </p:nvSpPr>
-        <p:spPr>
-          <a:xfrm>
-            <a:off x="1334844" y="2157212"/>
-            <a:ext cx="6895933" cy="369332"/>
-          </a:xfrm>
-          <a:prstGeom prst="rect">
-            <a:avLst/>
-          </a:prstGeom>
-          <a:noFill/>
-          <a:ln>
-            <a:solidFill>
-              <a:srgbClr val="859DB0"/>
-            </a:solidFill>
-          </a:ln>
-        </p:spPr>
-        <p:txBody>
-          <a:bodyPr wrap="square" rtlCol="0">
-            <a:spAutoFit/>
-          </a:bodyPr>
-          <a:lstStyle/>
-          <a:p>
-            <a:pPr algn="ctr"/>
-            <a:r>
-              <a:rPr lang="en-US" b="1" dirty="0">
-                <a:latin typeface="Times New Roman" panose="02020603050405020304" pitchFamily="18" charset="0"/>
-                <a:ea typeface="Yu Gothic" panose="020B0400000000000000" pitchFamily="34" charset="-128"/>
-                <a:cs typeface="Times New Roman" panose="02020603050405020304" pitchFamily="18" charset="0"/>
-              </a:rPr>
-              <a:t>Part II: Cognitive-Affective Maps study</a:t>
-            </a:r>
-          </a:p>
-        </p:txBody>
-      </p:sp>
-      <p:sp>
-        <p:nvSpPr>
-          <p:cNvPr id="38" name="TextBox 35">
-            <a:extLst>
-              <a:ext uri="{FF2B5EF4-FFF2-40B4-BE49-F238E27FC236}">
-                <a16:creationId xmlns:a16="http://schemas.microsoft.com/office/drawing/2014/main" id="{94061FB4-EF7F-4A89-BDD8-2A2DA2E1B222}"/>
-              </a:ext>
-            </a:extLst>
-          </p:cNvPr>
-          <p:cNvSpPr txBox="1"/>
-          <p:nvPr/>
-        </p:nvSpPr>
-        <p:spPr>
-          <a:xfrm>
-            <a:off x="1334844" y="5150744"/>
-            <a:ext cx="6895933" cy="369332"/>
-          </a:xfrm>
-          <a:prstGeom prst="rect">
-            <a:avLst/>
-          </a:prstGeom>
-          <a:noFill/>
-          <a:ln>
-            <a:solidFill>
-              <a:srgbClr val="859DB0"/>
-            </a:solidFill>
-          </a:ln>
-        </p:spPr>
-        <p:txBody>
-          <a:bodyPr wrap="square" rtlCol="0">
-            <a:spAutoFit/>
-          </a:bodyPr>
-          <a:lstStyle/>
-          <a:p>
-            <a:pPr algn="ctr"/>
-            <a:r>
-              <a:rPr lang="en-US" b="1" dirty="0">
-                <a:latin typeface="Times New Roman" panose="02020603050405020304" pitchFamily="18" charset="0"/>
-                <a:ea typeface="Yu Gothic" panose="020B0400000000000000" pitchFamily="34" charset="-128"/>
-                <a:cs typeface="Times New Roman" panose="02020603050405020304" pitchFamily="18" charset="0"/>
-              </a:rPr>
-              <a:t>Part III: use LLMs to create textual descriptions</a:t>
-            </a:r>
-          </a:p>
-        </p:txBody>
-      </p:sp>
-      <p:sp>
-        <p:nvSpPr>
-          <p:cNvPr id="39" name="Pfeil: nach rechts 38">
-            <a:extLst>
-              <a:ext uri="{FF2B5EF4-FFF2-40B4-BE49-F238E27FC236}">
-                <a16:creationId xmlns:a16="http://schemas.microsoft.com/office/drawing/2014/main" id="{40A44B92-4F5B-4C9C-B729-9E3593B403D6}"/>
-              </a:ext>
-            </a:extLst>
-          </p:cNvPr>
-          <p:cNvSpPr/>
-          <p:nvPr/>
-        </p:nvSpPr>
-        <p:spPr>
-          <a:xfrm>
-            <a:off x="2089817" y="5862521"/>
-            <a:ext cx="1276135" cy="494663"/>
-          </a:xfrm>
-          <a:prstGeom prst="rightArrow">
-            <a:avLst/>
-          </a:prstGeom>
-        </p:spPr>
-        <p:style>
-          <a:lnRef idx="2">
-            <a:schemeClr val="dk1">
-              <a:shade val="50000"/>
-            </a:schemeClr>
-          </a:lnRef>
-          <a:fillRef idx="1">
-            <a:schemeClr val="dk1"/>
-          </a:fillRef>
-          <a:effectRef idx="0">
-            <a:schemeClr val="dk1"/>
-          </a:effectRef>
-          <a:fontRef idx="minor">
-            <a:schemeClr val="lt1"/>
-          </a:fontRef>
-        </p:style>
-        <p:txBody>
-          <a:bodyPr rtlCol="0" anchor="ctr"/>
-          <a:lstStyle/>
-          <a:p>
-            <a:pPr algn="ctr"/>
-            <a:endParaRPr lang="en-US" sz="1600"/>
-          </a:p>
-        </p:txBody>
-      </p:sp>
     </p:spTree>
     <p:extLst>
       <p:ext uri="{BB962C8B-B14F-4D97-AF65-F5344CB8AC3E}">
